--- a/M&A/カンテサンス/条件合意とLOIの比較_投資家様向け_20261010.pptx
+++ b/M&A/カンテサンス/条件合意とLOIの比較_投資家様向け_20261010.pptx
@@ -1342,7 +1342,7 @@
                 <a:ea typeface="Calibri" pitchFamily="34" charset="-122"/>
                 <a:cs typeface="Calibri" pitchFamily="34" charset="-120"/>
               </a:rPr>
-              <a:t>確定で払う部分を50〜51億円に抑え、上振れ分は「星評価の維持」を条件とする後払い（アーンアウト）に切り替えました。</a:t>
+              <a:t>株式譲渡対価を入札の最高札（50.5億円）と同水準の50〜51億円で確定し、上振れ分は「星評価の維持」を条件とする後払い（アーンアウト）に切り替えました。</a:t>
             </a:r>
             <a:endParaRPr lang="en-US" sz="1150" dirty="0"/>
           </a:p>
@@ -2018,7 +2018,7 @@
                 <a:gridCol w="2377440"/>
                 <a:gridCol w="3191256"/>
               </a:tblGrid>
-              <a:tr h="329184">
+              <a:tr h="301752">
                 <a:tc>
                   <a:txBody>
                     <a:bodyPr/>
@@ -2281,7 +2281,7 @@
                   </a:tcPr>
                 </a:tc>
               </a:tr>
-              <a:tr h="329184">
+              <a:tr h="301752">
                 <a:tc>
                   <a:txBody>
                     <a:bodyPr/>
@@ -2494,7 +2494,7 @@
                           <a:ea typeface="Calibri" pitchFamily="34" charset="-122"/>
                           <a:cs typeface="Calibri" pitchFamily="34" charset="-120"/>
                         </a:rPr>
-                        <a:t>確定部分は上限が下がる</a:t>
+                        <a:t>前払い2.25億円を含む</a:t>
                       </a:r>
                       <a:endParaRPr lang="en-US" sz="850" dirty="0">
                         <a:latin typeface="Calibri" charset="0"/>
@@ -2543,7 +2543,7 @@
                   </a:tcPr>
                 </a:tc>
               </a:tr>
-              <a:tr h="329184">
+              <a:tr h="301752">
                 <a:tc>
                   <a:txBody>
                     <a:bodyPr/>
@@ -2805,7 +2805,7 @@
                   </a:tcPr>
                 </a:tc>
               </a:tr>
-              <a:tr h="329184">
+              <a:tr h="301752">
                 <a:tc>
                   <a:txBody>
                     <a:bodyPr/>
@@ -3067,7 +3067,7 @@
                   </a:tcPr>
                 </a:tc>
               </a:tr>
-              <a:tr h="329184">
+              <a:tr h="301752">
                 <a:tc>
                   <a:txBody>
                     <a:bodyPr/>
@@ -3085,7 +3085,7 @@
                           <a:ea typeface="Calibri" pitchFamily="34" charset="-122"/>
                           <a:cs typeface="Calibri" pitchFamily="34" charset="-120"/>
                         </a:rPr>
-                        <a:t>最大の総額（手数料除く）</a:t>
+                        <a:t>総額：星評価を維持できた場合</a:t>
                       </a:r>
                       <a:endParaRPr lang="en-US" sz="1000" dirty="0">
                         <a:latin typeface="Calibri" charset="0"/>
@@ -3153,7 +3153,7 @@
                           <a:ea typeface="Calibri" pitchFamily="34" charset="-122"/>
                           <a:cs typeface="Calibri" pitchFamily="34" charset="-120"/>
                         </a:rPr>
-                        <a:t>55.3</a:t>
+                        <a:t>50.2〜55.3</a:t>
                       </a:r>
                       <a:endParaRPr lang="en-US" sz="1000" dirty="0">
                         <a:latin typeface="Calibri" charset="0"/>
@@ -3221,7 +3221,7 @@
                           <a:ea typeface="Calibri" pitchFamily="34" charset="-122"/>
                           <a:cs typeface="Calibri" pitchFamily="34" charset="-120"/>
                         </a:rPr>
-                        <a:t>61.75</a:t>
+                        <a:t>最大61.75</a:t>
                       </a:r>
                       <a:endParaRPr lang="en-US" sz="1000" dirty="0">
                         <a:latin typeface="Calibri" charset="0"/>
@@ -3289,7 +3289,7 @@
                           <a:ea typeface="Calibri" pitchFamily="34" charset="-122"/>
                           <a:cs typeface="Calibri" pitchFamily="34" charset="-120"/>
                         </a:rPr>
-                        <a:t>星評価を維持できた場合のみ</a:t>
+                        <a:t>成果が出た場合のみ増える</a:t>
                       </a:r>
                       <a:endParaRPr lang="en-US" sz="850" dirty="0">
                         <a:latin typeface="Calibri" charset="0"/>
@@ -3341,6 +3341,268 @@
                   </a:tcPr>
                 </a:tc>
               </a:tr>
+              <a:tr h="301752">
+                <a:tc>
+                  <a:txBody>
+                    <a:bodyPr/>
+                    <a:lstStyle/>
+                    <a:p>
+                      <a:pPr indent="0" marL="0">
+                        <a:buNone/>
+                      </a:pPr>
+                      <a:r>
+                        <a:rPr lang="en-US" sz="1000" b="1" dirty="0">
+                          <a:solidFill>
+                            <a:srgbClr val="1F1A1C"/>
+                          </a:solidFill>
+                          <a:latin typeface="Calibri" pitchFamily="34" charset="0"/>
+                          <a:ea typeface="Calibri" pitchFamily="34" charset="-122"/>
+                          <a:cs typeface="Calibri" pitchFamily="34" charset="-120"/>
+                        </a:rPr>
+                        <a:t>総額：4年目に星評価を失った場合</a:t>
+                      </a:r>
+                      <a:endParaRPr lang="en-US" sz="1000" dirty="0">
+                        <a:latin typeface="Calibri" charset="0"/>
+                        <a:ea typeface="Calibri" charset="0"/>
+                        <a:cs typeface="Calibri" charset="0"/>
+                      </a:endParaRPr>
+                    </a:p>
+                  </a:txBody>
+                  <a:tcPr marL="63500" marR="63500" marT="38100" marB="38100" anchor="ctr">
+                    <a:lnL w="6350" cap="flat" cmpd="sng" algn="ctr">
+                      <a:solidFill>
+                        <a:srgbClr val="E4DADD"/>
+                      </a:solidFill>
+                      <a:prstDash val="solid"/>
+                      <a:round/>
+                      <a:headEnd type="none" w="med" len="med"/>
+                      <a:tailEnd type="none" w="med" len="med"/>
+                    </a:lnL>
+                    <a:lnR w="6350" cap="flat" cmpd="sng" algn="ctr">
+                      <a:solidFill>
+                        <a:srgbClr val="E4DADD"/>
+                      </a:solidFill>
+                      <a:prstDash val="solid"/>
+                      <a:round/>
+                      <a:headEnd type="none" w="med" len="med"/>
+                      <a:tailEnd type="none" w="med" len="med"/>
+                    </a:lnR>
+                    <a:lnT w="6350" cap="flat" cmpd="sng" algn="ctr">
+                      <a:solidFill>
+                        <a:srgbClr val="E4DADD"/>
+                      </a:solidFill>
+                      <a:prstDash val="solid"/>
+                      <a:round/>
+                      <a:headEnd type="none" w="med" len="med"/>
+                      <a:tailEnd type="none" w="med" len="med"/>
+                    </a:lnT>
+                    <a:lnB w="6350" cap="flat" cmpd="sng" algn="ctr">
+                      <a:solidFill>
+                        <a:srgbClr val="E4DADD"/>
+                      </a:solidFill>
+                      <a:prstDash val="solid"/>
+                      <a:round/>
+                      <a:headEnd type="none" w="med" len="med"/>
+                      <a:tailEnd type="none" w="med" len="med"/>
+                    </a:lnB>
+                  </a:tcPr>
+                </a:tc>
+                <a:tc>
+                  <a:txBody>
+                    <a:bodyPr/>
+                    <a:lstStyle/>
+                    <a:p>
+                      <a:pPr algn="r" indent="0" marL="0">
+                        <a:buNone/>
+                      </a:pPr>
+                      <a:r>
+                        <a:rPr lang="en-US" sz="1000" b="1" dirty="0">
+                          <a:solidFill>
+                            <a:srgbClr val="1F1A1C"/>
+                          </a:solidFill>
+                          <a:latin typeface="Calibri" pitchFamily="34" charset="0"/>
+                          <a:ea typeface="Calibri" pitchFamily="34" charset="-122"/>
+                          <a:cs typeface="Calibri" pitchFamily="34" charset="-120"/>
+                        </a:rPr>
+                        <a:t>50.2〜55.3</a:t>
+                      </a:r>
+                      <a:endParaRPr lang="en-US" sz="1000" dirty="0">
+                        <a:latin typeface="Calibri" charset="0"/>
+                        <a:ea typeface="Calibri" charset="0"/>
+                        <a:cs typeface="Calibri" charset="0"/>
+                      </a:endParaRPr>
+                    </a:p>
+                  </a:txBody>
+                  <a:tcPr marL="63500" marR="63500" marT="38100" marB="38100" anchor="ctr">
+                    <a:lnL w="6350" cap="flat" cmpd="sng" algn="ctr">
+                      <a:solidFill>
+                        <a:srgbClr val="E4DADD"/>
+                      </a:solidFill>
+                      <a:prstDash val="solid"/>
+                      <a:round/>
+                      <a:headEnd type="none" w="med" len="med"/>
+                      <a:tailEnd type="none" w="med" len="med"/>
+                    </a:lnL>
+                    <a:lnR w="6350" cap="flat" cmpd="sng" algn="ctr">
+                      <a:solidFill>
+                        <a:srgbClr val="E4DADD"/>
+                      </a:solidFill>
+                      <a:prstDash val="solid"/>
+                      <a:round/>
+                      <a:headEnd type="none" w="med" len="med"/>
+                      <a:tailEnd type="none" w="med" len="med"/>
+                    </a:lnR>
+                    <a:lnT w="6350" cap="flat" cmpd="sng" algn="ctr">
+                      <a:solidFill>
+                        <a:srgbClr val="E4DADD"/>
+                      </a:solidFill>
+                      <a:prstDash val="solid"/>
+                      <a:round/>
+                      <a:headEnd type="none" w="med" len="med"/>
+                      <a:tailEnd type="none" w="med" len="med"/>
+                    </a:lnT>
+                    <a:lnB w="6350" cap="flat" cmpd="sng" algn="ctr">
+                      <a:solidFill>
+                        <a:srgbClr val="E4DADD"/>
+                      </a:solidFill>
+                      <a:prstDash val="solid"/>
+                      <a:round/>
+                      <a:headEnd type="none" w="med" len="med"/>
+                      <a:tailEnd type="none" w="med" len="med"/>
+                    </a:lnB>
+                  </a:tcPr>
+                </a:tc>
+                <a:tc>
+                  <a:txBody>
+                    <a:bodyPr/>
+                    <a:lstStyle/>
+                    <a:p>
+                      <a:pPr algn="r" indent="0" marL="0">
+                        <a:buNone/>
+                      </a:pPr>
+                      <a:r>
+                        <a:rPr lang="en-US" sz="1000" b="1" dirty="0">
+                          <a:solidFill>
+                            <a:srgbClr val="1F1A1C"/>
+                          </a:solidFill>
+                          <a:latin typeface="Calibri" pitchFamily="34" charset="0"/>
+                          <a:ea typeface="Calibri" pitchFamily="34" charset="-122"/>
+                          <a:cs typeface="Calibri" pitchFamily="34" charset="-120"/>
+                        </a:rPr>
+                        <a:t>52.75〜53.75</a:t>
+                      </a:r>
+                      <a:endParaRPr lang="en-US" sz="1000" dirty="0">
+                        <a:latin typeface="Calibri" charset="0"/>
+                        <a:ea typeface="Calibri" charset="0"/>
+                        <a:cs typeface="Calibri" charset="0"/>
+                      </a:endParaRPr>
+                    </a:p>
+                  </a:txBody>
+                  <a:tcPr marL="63500" marR="63500" marT="38100" marB="38100" anchor="ctr">
+                    <a:lnL w="6350" cap="flat" cmpd="sng" algn="ctr">
+                      <a:solidFill>
+                        <a:srgbClr val="E4DADD"/>
+                      </a:solidFill>
+                      <a:prstDash val="solid"/>
+                      <a:round/>
+                      <a:headEnd type="none" w="med" len="med"/>
+                      <a:tailEnd type="none" w="med" len="med"/>
+                    </a:lnL>
+                    <a:lnR w="6350" cap="flat" cmpd="sng" algn="ctr">
+                      <a:solidFill>
+                        <a:srgbClr val="E4DADD"/>
+                      </a:solidFill>
+                      <a:prstDash val="solid"/>
+                      <a:round/>
+                      <a:headEnd type="none" w="med" len="med"/>
+                      <a:tailEnd type="none" w="med" len="med"/>
+                    </a:lnR>
+                    <a:lnT w="6350" cap="flat" cmpd="sng" algn="ctr">
+                      <a:solidFill>
+                        <a:srgbClr val="E4DADD"/>
+                      </a:solidFill>
+                      <a:prstDash val="solid"/>
+                      <a:round/>
+                      <a:headEnd type="none" w="med" len="med"/>
+                      <a:tailEnd type="none" w="med" len="med"/>
+                    </a:lnT>
+                    <a:lnB w="6350" cap="flat" cmpd="sng" algn="ctr">
+                      <a:solidFill>
+                        <a:srgbClr val="E4DADD"/>
+                      </a:solidFill>
+                      <a:prstDash val="solid"/>
+                      <a:round/>
+                      <a:headEnd type="none" w="med" len="med"/>
+                      <a:tailEnd type="none" w="med" len="med"/>
+                    </a:lnB>
+                  </a:tcPr>
+                </a:tc>
+                <a:tc>
+                  <a:txBody>
+                    <a:bodyPr/>
+                    <a:lstStyle/>
+                    <a:p>
+                      <a:pPr algn="r" indent="0" marL="0">
+                        <a:buNone/>
+                      </a:pPr>
+                      <a:r>
+                        <a:rPr lang="en-US" sz="850" dirty="0">
+                          <a:solidFill>
+                            <a:srgbClr val="6E6368"/>
+                          </a:solidFill>
+                          <a:latin typeface="Calibri" pitchFamily="34" charset="0"/>
+                          <a:ea typeface="Calibri" pitchFamily="34" charset="-122"/>
+                          <a:cs typeface="Calibri" pitchFamily="34" charset="-120"/>
+                        </a:rPr>
+                        <a:t>アーンアウトの支払いなし</a:t>
+                      </a:r>
+                      <a:endParaRPr lang="en-US" sz="850" dirty="0">
+                        <a:latin typeface="Calibri" charset="0"/>
+                        <a:ea typeface="Calibri" charset="0"/>
+                        <a:cs typeface="Calibri" charset="0"/>
+                      </a:endParaRPr>
+                    </a:p>
+                  </a:txBody>
+                  <a:tcPr marL="63500" marR="63500" marT="38100" marB="38100" anchor="ctr">
+                    <a:lnL w="6350" cap="flat" cmpd="sng" algn="ctr">
+                      <a:solidFill>
+                        <a:srgbClr val="E4DADD"/>
+                      </a:solidFill>
+                      <a:prstDash val="solid"/>
+                      <a:round/>
+                      <a:headEnd type="none" w="med" len="med"/>
+                      <a:tailEnd type="none" w="med" len="med"/>
+                    </a:lnL>
+                    <a:lnR w="6350" cap="flat" cmpd="sng" algn="ctr">
+                      <a:solidFill>
+                        <a:srgbClr val="E4DADD"/>
+                      </a:solidFill>
+                      <a:prstDash val="solid"/>
+                      <a:round/>
+                      <a:headEnd type="none" w="med" len="med"/>
+                      <a:tailEnd type="none" w="med" len="med"/>
+                    </a:lnR>
+                    <a:lnT w="6350" cap="flat" cmpd="sng" algn="ctr">
+                      <a:solidFill>
+                        <a:srgbClr val="E4DADD"/>
+                      </a:solidFill>
+                      <a:prstDash val="solid"/>
+                      <a:round/>
+                      <a:headEnd type="none" w="med" len="med"/>
+                      <a:tailEnd type="none" w="med" len="med"/>
+                    </a:lnT>
+                    <a:lnB w="6350" cap="flat" cmpd="sng" algn="ctr">
+                      <a:solidFill>
+                        <a:srgbClr val="E4DADD"/>
+                      </a:solidFill>
+                      <a:prstDash val="solid"/>
+                      <a:round/>
+                      <a:headEnd type="none" w="med" len="med"/>
+                      <a:tailEnd type="none" w="med" len="med"/>
+                    </a:lnB>
+                  </a:tcPr>
+                </a:tc>
+              </a:tr>
             </a:tbl>
           </a:graphicData>
         </a:graphic>
@@ -3353,7 +3615,7 @@
         </p:nvSpPr>
         <p:spPr>
           <a:xfrm>
-            <a:off x="566928" y="5715000"/>
+            <a:off x="566928" y="5806440"/>
             <a:ext cx="11055096" cy="548640"/>
           </a:xfrm>
           <a:prstGeom prst="rect">
@@ -4123,13 +4385,13 @@
                       <a:r>
                         <a:rPr lang="en-US" sz="950" b="1" dirty="0">
                           <a:solidFill>
-                            <a:srgbClr val="9B2C2C"/>
+                            <a:srgbClr val="2E6F4E"/>
                           </a:solidFill>
                           <a:latin typeface="Calibri" pitchFamily="34" charset="0"/>
                           <a:ea typeface="Calibri" pitchFamily="34" charset="-122"/>
                           <a:cs typeface="Calibri" pitchFamily="34" charset="-120"/>
                         </a:rPr>
-                        <a:t>不利</a:t>
+                        <a:t>有利</a:t>
                       </a:r>
                       <a:endParaRPr lang="en-US" sz="950" dirty="0">
                         <a:latin typeface="Calibri" charset="0"/>
@@ -4144,13 +4406,13 @@
                       <a:r>
                         <a:rPr lang="en-US" sz="950" b="1" dirty="0">
                           <a:solidFill>
-                            <a:srgbClr val="9B2C2C"/>
+                            <a:srgbClr val="2E6F4E"/>
                           </a:solidFill>
                           <a:latin typeface="Calibri" pitchFamily="34" charset="0"/>
                           <a:ea typeface="Calibri" pitchFamily="34" charset="-122"/>
                           <a:cs typeface="Calibri" pitchFamily="34" charset="-120"/>
                         </a:rPr>
-                        <a:t>ネットキャッシュ連動なし</a:t>
+                        <a:t>入札の最高札50.5億円と同水準</a:t>
                       </a:r>
                       <a:endParaRPr lang="en-US" sz="950" dirty="0">
                         <a:latin typeface="Calibri" charset="0"/>
@@ -5655,7 +5917,7 @@
                           <a:ea typeface="Calibri" pitchFamily="34" charset="-122"/>
                           <a:cs typeface="Calibri" pitchFamily="34" charset="-120"/>
                         </a:rPr>
-                        <a:t>監修として関与（週1〜2回程度のイメージ）</a:t>
+                        <a:t>監修として関与（週1〜2回程度のイメージ）。報酬あり</a:t>
                       </a:r>
                       <a:endParaRPr lang="en-US" sz="950" dirty="0">
                         <a:latin typeface="Calibri" charset="0"/>
@@ -5720,7 +5982,290 @@
                           <a:ea typeface="Calibri" pitchFamily="34" charset="-122"/>
                           <a:cs typeface="Calibri" pitchFamily="34" charset="-120"/>
                         </a:rPr>
-                        <a:t>出勤義務なし（監修の日数・方法は売主の裁量）</a:t>
+                        <a:t>出勤義務なし（監修の日数・方法は売主の裁量）。報酬なし（4・5年目のアーンアウトに報酬を含む）</a:t>
+                      </a:r>
+                      <a:endParaRPr lang="en-US" sz="950" dirty="0">
+                        <a:latin typeface="Calibri" charset="0"/>
+                        <a:ea typeface="Calibri" charset="0"/>
+                        <a:cs typeface="Calibri" charset="0"/>
+                      </a:endParaRPr>
+                    </a:p>
+                  </a:txBody>
+                  <a:tcPr marL="63500" marR="63500" marT="38100" marB="38100" anchor="ctr">
+                    <a:lnL w="6350" cap="flat" cmpd="sng" algn="ctr">
+                      <a:solidFill>
+                        <a:srgbClr val="E4DADD"/>
+                      </a:solidFill>
+                      <a:prstDash val="solid"/>
+                      <a:round/>
+                      <a:headEnd type="none" w="med" len="med"/>
+                      <a:tailEnd type="none" w="med" len="med"/>
+                    </a:lnL>
+                    <a:lnR w="6350" cap="flat" cmpd="sng" algn="ctr">
+                      <a:solidFill>
+                        <a:srgbClr val="E4DADD"/>
+                      </a:solidFill>
+                      <a:prstDash val="solid"/>
+                      <a:round/>
+                      <a:headEnd type="none" w="med" len="med"/>
+                      <a:tailEnd type="none" w="med" len="med"/>
+                    </a:lnR>
+                    <a:lnT w="6350" cap="flat" cmpd="sng" algn="ctr">
+                      <a:solidFill>
+                        <a:srgbClr val="E4DADD"/>
+                      </a:solidFill>
+                      <a:prstDash val="solid"/>
+                      <a:round/>
+                      <a:headEnd type="none" w="med" len="med"/>
+                      <a:tailEnd type="none" w="med" len="med"/>
+                    </a:lnT>
+                    <a:lnB w="6350" cap="flat" cmpd="sng" algn="ctr">
+                      <a:solidFill>
+                        <a:srgbClr val="E4DADD"/>
+                      </a:solidFill>
+                      <a:prstDash val="solid"/>
+                      <a:round/>
+                      <a:headEnd type="none" w="med" len="med"/>
+                      <a:tailEnd type="none" w="med" len="med"/>
+                    </a:lnB>
+                  </a:tcPr>
+                </a:tc>
+                <a:tc>
+                  <a:txBody>
+                    <a:bodyPr/>
+                    <a:lstStyle/>
+                    <a:p>
+                      <a:pPr algn="ctr" indent="0" marL="0">
+                        <a:buNone/>
+                      </a:pPr>
+                      <a:r>
+                        <a:rPr lang="en-US" sz="950" b="1" dirty="0">
+                          <a:solidFill>
+                            <a:srgbClr val="B58B2A"/>
+                          </a:solidFill>
+                          <a:latin typeface="Calibri" pitchFamily="34" charset="0"/>
+                          <a:ea typeface="Calibri" pitchFamily="34" charset="-122"/>
+                          <a:cs typeface="Calibri" pitchFamily="34" charset="-120"/>
+                        </a:rPr>
+                        <a:t>中立</a:t>
+                      </a:r>
+                      <a:endParaRPr lang="en-US" sz="950" dirty="0">
+                        <a:latin typeface="Calibri" charset="0"/>
+                        <a:ea typeface="Calibri" charset="0"/>
+                        <a:cs typeface="Calibri" charset="0"/>
+                      </a:endParaRPr>
+                    </a:p>
+                    <a:p>
+                      <a:pPr algn="ctr" indent="0" marL="0">
+                        <a:buNone/>
+                      </a:pPr>
+                      <a:r>
+                        <a:rPr lang="en-US" sz="950" b="1" dirty="0">
+                          <a:solidFill>
+                            <a:srgbClr val="B58B2A"/>
+                          </a:solidFill>
+                          <a:latin typeface="Calibri" pitchFamily="34" charset="0"/>
+                          <a:ea typeface="Calibri" pitchFamily="34" charset="-122"/>
+                          <a:cs typeface="Calibri" pitchFamily="34" charset="-120"/>
+                        </a:rPr>
+                        <a:t>競業避止で担保</a:t>
+                      </a:r>
+                      <a:endParaRPr lang="en-US" sz="950" dirty="0">
+                        <a:latin typeface="Calibri" charset="0"/>
+                        <a:ea typeface="Calibri" charset="0"/>
+                        <a:cs typeface="Calibri" charset="0"/>
+                      </a:endParaRPr>
+                    </a:p>
+                  </a:txBody>
+                  <a:tcPr marL="63500" marR="63500" marT="38100" marB="38100" anchor="ctr">
+                    <a:lnL w="6350" cap="flat" cmpd="sng" algn="ctr">
+                      <a:solidFill>
+                        <a:srgbClr val="E4DADD"/>
+                      </a:solidFill>
+                      <a:prstDash val="solid"/>
+                      <a:round/>
+                      <a:headEnd type="none" w="med" len="med"/>
+                      <a:tailEnd type="none" w="med" len="med"/>
+                    </a:lnL>
+                    <a:lnR w="6350" cap="flat" cmpd="sng" algn="ctr">
+                      <a:solidFill>
+                        <a:srgbClr val="E4DADD"/>
+                      </a:solidFill>
+                      <a:prstDash val="solid"/>
+                      <a:round/>
+                      <a:headEnd type="none" w="med" len="med"/>
+                      <a:tailEnd type="none" w="med" len="med"/>
+                    </a:lnR>
+                    <a:lnT w="6350" cap="flat" cmpd="sng" algn="ctr">
+                      <a:solidFill>
+                        <a:srgbClr val="E4DADD"/>
+                      </a:solidFill>
+                      <a:prstDash val="solid"/>
+                      <a:round/>
+                      <a:headEnd type="none" w="med" len="med"/>
+                      <a:tailEnd type="none" w="med" len="med"/>
+                    </a:lnT>
+                    <a:lnB w="6350" cap="flat" cmpd="sng" algn="ctr">
+                      <a:solidFill>
+                        <a:srgbClr val="E4DADD"/>
+                      </a:solidFill>
+                      <a:prstDash val="solid"/>
+                      <a:round/>
+                      <a:headEnd type="none" w="med" len="med"/>
+                      <a:tailEnd type="none" w="med" len="med"/>
+                    </a:lnB>
+                  </a:tcPr>
+                </a:tc>
+              </a:tr>
+              <a:tr h="438912">
+                <a:tc>
+                  <a:txBody>
+                    <a:bodyPr/>
+                    <a:lstStyle/>
+                    <a:p>
+                      <a:pPr indent="0" marL="0">
+                        <a:buNone/>
+                      </a:pPr>
+                      <a:r>
+                        <a:rPr lang="en-US" sz="950" b="1" dirty="0">
+                          <a:solidFill>
+                            <a:srgbClr val="1F1A1C"/>
+                          </a:solidFill>
+                          <a:latin typeface="Calibri" pitchFamily="34" charset="0"/>
+                          <a:ea typeface="Calibri" pitchFamily="34" charset="-122"/>
+                          <a:cs typeface="Calibri" pitchFamily="34" charset="-120"/>
+                        </a:rPr>
+                        <a:t>決済時の支払い（手数料込み）</a:t>
+                      </a:r>
+                      <a:endParaRPr lang="en-US" sz="950" dirty="0">
+                        <a:latin typeface="Calibri" charset="0"/>
+                        <a:ea typeface="Calibri" charset="0"/>
+                        <a:cs typeface="Calibri" charset="0"/>
+                      </a:endParaRPr>
+                    </a:p>
+                  </a:txBody>
+                  <a:tcPr marL="63500" marR="63500" marT="38100" marB="38100" anchor="ctr">
+                    <a:lnL w="6350" cap="flat" cmpd="sng" algn="ctr">
+                      <a:solidFill>
+                        <a:srgbClr val="E4DADD"/>
+                      </a:solidFill>
+                      <a:prstDash val="solid"/>
+                      <a:round/>
+                      <a:headEnd type="none" w="med" len="med"/>
+                      <a:tailEnd type="none" w="med" len="med"/>
+                    </a:lnL>
+                    <a:lnR w="6350" cap="flat" cmpd="sng" algn="ctr">
+                      <a:solidFill>
+                        <a:srgbClr val="E4DADD"/>
+                      </a:solidFill>
+                      <a:prstDash val="solid"/>
+                      <a:round/>
+                      <a:headEnd type="none" w="med" len="med"/>
+                      <a:tailEnd type="none" w="med" len="med"/>
+                    </a:lnR>
+                    <a:lnT w="6350" cap="flat" cmpd="sng" algn="ctr">
+                      <a:solidFill>
+                        <a:srgbClr val="E4DADD"/>
+                      </a:solidFill>
+                      <a:prstDash val="solid"/>
+                      <a:round/>
+                      <a:headEnd type="none" w="med" len="med"/>
+                      <a:tailEnd type="none" w="med" len="med"/>
+                    </a:lnT>
+                    <a:lnB w="6350" cap="flat" cmpd="sng" algn="ctr">
+                      <a:solidFill>
+                        <a:srgbClr val="E4DADD"/>
+                      </a:solidFill>
+                      <a:prstDash val="solid"/>
+                      <a:round/>
+                      <a:headEnd type="none" w="med" len="med"/>
+                      <a:tailEnd type="none" w="med" len="med"/>
+                    </a:lnB>
+                  </a:tcPr>
+                </a:tc>
+                <a:tc>
+                  <a:txBody>
+                    <a:bodyPr/>
+                    <a:lstStyle/>
+                    <a:p>
+                      <a:pPr indent="0" marL="0">
+                        <a:buNone/>
+                      </a:pPr>
+                      <a:r>
+                        <a:rPr lang="en-US" sz="950" dirty="0">
+                          <a:solidFill>
+                            <a:srgbClr val="1F1A1C"/>
+                          </a:solidFill>
+                          <a:latin typeface="Calibri" pitchFamily="34" charset="0"/>
+                          <a:ea typeface="Calibri" pitchFamily="34" charset="-122"/>
+                          <a:cs typeface="Calibri" pitchFamily="34" charset="-120"/>
+                        </a:rPr>
+                        <a:t>約51.9〜57.0億円</a:t>
+                      </a:r>
+                      <a:endParaRPr lang="en-US" sz="950" dirty="0">
+                        <a:latin typeface="Calibri" charset="0"/>
+                        <a:ea typeface="Calibri" charset="0"/>
+                        <a:cs typeface="Calibri" charset="0"/>
+                      </a:endParaRPr>
+                    </a:p>
+                  </a:txBody>
+                  <a:tcPr marL="63500" marR="63500" marT="38100" marB="38100" anchor="ctr">
+                    <a:lnL w="6350" cap="flat" cmpd="sng" algn="ctr">
+                      <a:solidFill>
+                        <a:srgbClr val="E4DADD"/>
+                      </a:solidFill>
+                      <a:prstDash val="solid"/>
+                      <a:round/>
+                      <a:headEnd type="none" w="med" len="med"/>
+                      <a:tailEnd type="none" w="med" len="med"/>
+                    </a:lnL>
+                    <a:lnR w="6350" cap="flat" cmpd="sng" algn="ctr">
+                      <a:solidFill>
+                        <a:srgbClr val="E4DADD"/>
+                      </a:solidFill>
+                      <a:prstDash val="solid"/>
+                      <a:round/>
+                      <a:headEnd type="none" w="med" len="med"/>
+                      <a:tailEnd type="none" w="med" len="med"/>
+                    </a:lnR>
+                    <a:lnT w="6350" cap="flat" cmpd="sng" algn="ctr">
+                      <a:solidFill>
+                        <a:srgbClr val="E4DADD"/>
+                      </a:solidFill>
+                      <a:prstDash val="solid"/>
+                      <a:round/>
+                      <a:headEnd type="none" w="med" len="med"/>
+                      <a:tailEnd type="none" w="med" len="med"/>
+                    </a:lnT>
+                    <a:lnB w="6350" cap="flat" cmpd="sng" algn="ctr">
+                      <a:solidFill>
+                        <a:srgbClr val="E4DADD"/>
+                      </a:solidFill>
+                      <a:prstDash val="solid"/>
+                      <a:round/>
+                      <a:headEnd type="none" w="med" len="med"/>
+                      <a:tailEnd type="none" w="med" len="med"/>
+                    </a:lnB>
+                  </a:tcPr>
+                </a:tc>
+                <a:tc>
+                  <a:txBody>
+                    <a:bodyPr/>
+                    <a:lstStyle/>
+                    <a:p>
+                      <a:pPr indent="0" marL="0">
+                        <a:buNone/>
+                      </a:pPr>
+                      <a:r>
+                        <a:rPr lang="en-US" sz="950" dirty="0">
+                          <a:solidFill>
+                            <a:srgbClr val="1F1A1C"/>
+                          </a:solidFill>
+                          <a:latin typeface="Calibri" pitchFamily="34" charset="0"/>
+                          <a:ea typeface="Calibri" pitchFamily="34" charset="-122"/>
+                          <a:cs typeface="Calibri" pitchFamily="34" charset="-120"/>
+                        </a:rPr>
+                        <a:t>約53.9〜54.9億円</a:t>
                       </a:r>
                       <a:endParaRPr lang="en-US" sz="950" dirty="0">
                         <a:latin typeface="Calibri" charset="0"/>
@@ -5806,268 +6351,6 @@
                           <a:ea typeface="Calibri" pitchFamily="34" charset="-122"/>
                           <a:cs typeface="Calibri" pitchFamily="34" charset="-120"/>
                         </a:rPr>
-                        <a:t>競業避止で補う</a:t>
-                      </a:r>
-                      <a:endParaRPr lang="en-US" sz="950" dirty="0">
-                        <a:latin typeface="Calibri" charset="0"/>
-                        <a:ea typeface="Calibri" charset="0"/>
-                        <a:cs typeface="Calibri" charset="0"/>
-                      </a:endParaRPr>
-                    </a:p>
-                  </a:txBody>
-                  <a:tcPr marL="63500" marR="63500" marT="38100" marB="38100" anchor="ctr">
-                    <a:lnL w="6350" cap="flat" cmpd="sng" algn="ctr">
-                      <a:solidFill>
-                        <a:srgbClr val="E4DADD"/>
-                      </a:solidFill>
-                      <a:prstDash val="solid"/>
-                      <a:round/>
-                      <a:headEnd type="none" w="med" len="med"/>
-                      <a:tailEnd type="none" w="med" len="med"/>
-                    </a:lnL>
-                    <a:lnR w="6350" cap="flat" cmpd="sng" algn="ctr">
-                      <a:solidFill>
-                        <a:srgbClr val="E4DADD"/>
-                      </a:solidFill>
-                      <a:prstDash val="solid"/>
-                      <a:round/>
-                      <a:headEnd type="none" w="med" len="med"/>
-                      <a:tailEnd type="none" w="med" len="med"/>
-                    </a:lnR>
-                    <a:lnT w="6350" cap="flat" cmpd="sng" algn="ctr">
-                      <a:solidFill>
-                        <a:srgbClr val="E4DADD"/>
-                      </a:solidFill>
-                      <a:prstDash val="solid"/>
-                      <a:round/>
-                      <a:headEnd type="none" w="med" len="med"/>
-                      <a:tailEnd type="none" w="med" len="med"/>
-                    </a:lnT>
-                    <a:lnB w="6350" cap="flat" cmpd="sng" algn="ctr">
-                      <a:solidFill>
-                        <a:srgbClr val="E4DADD"/>
-                      </a:solidFill>
-                      <a:prstDash val="solid"/>
-                      <a:round/>
-                      <a:headEnd type="none" w="med" len="med"/>
-                      <a:tailEnd type="none" w="med" len="med"/>
-                    </a:lnB>
-                  </a:tcPr>
-                </a:tc>
-              </a:tr>
-              <a:tr h="438912">
-                <a:tc>
-                  <a:txBody>
-                    <a:bodyPr/>
-                    <a:lstStyle/>
-                    <a:p>
-                      <a:pPr indent="0" marL="0">
-                        <a:buNone/>
-                      </a:pPr>
-                      <a:r>
-                        <a:rPr lang="en-US" sz="950" b="1" dirty="0">
-                          <a:solidFill>
-                            <a:srgbClr val="1F1A1C"/>
-                          </a:solidFill>
-                          <a:latin typeface="Calibri" pitchFamily="34" charset="0"/>
-                          <a:ea typeface="Calibri" pitchFamily="34" charset="-122"/>
-                          <a:cs typeface="Calibri" pitchFamily="34" charset="-120"/>
-                        </a:rPr>
-                        <a:t>決済時の支払い（手数料込み）</a:t>
-                      </a:r>
-                      <a:endParaRPr lang="en-US" sz="950" dirty="0">
-                        <a:latin typeface="Calibri" charset="0"/>
-                        <a:ea typeface="Calibri" charset="0"/>
-                        <a:cs typeface="Calibri" charset="0"/>
-                      </a:endParaRPr>
-                    </a:p>
-                  </a:txBody>
-                  <a:tcPr marL="63500" marR="63500" marT="38100" marB="38100" anchor="ctr">
-                    <a:lnL w="6350" cap="flat" cmpd="sng" algn="ctr">
-                      <a:solidFill>
-                        <a:srgbClr val="E4DADD"/>
-                      </a:solidFill>
-                      <a:prstDash val="solid"/>
-                      <a:round/>
-                      <a:headEnd type="none" w="med" len="med"/>
-                      <a:tailEnd type="none" w="med" len="med"/>
-                    </a:lnL>
-                    <a:lnR w="6350" cap="flat" cmpd="sng" algn="ctr">
-                      <a:solidFill>
-                        <a:srgbClr val="E4DADD"/>
-                      </a:solidFill>
-                      <a:prstDash val="solid"/>
-                      <a:round/>
-                      <a:headEnd type="none" w="med" len="med"/>
-                      <a:tailEnd type="none" w="med" len="med"/>
-                    </a:lnR>
-                    <a:lnT w="6350" cap="flat" cmpd="sng" algn="ctr">
-                      <a:solidFill>
-                        <a:srgbClr val="E4DADD"/>
-                      </a:solidFill>
-                      <a:prstDash val="solid"/>
-                      <a:round/>
-                      <a:headEnd type="none" w="med" len="med"/>
-                      <a:tailEnd type="none" w="med" len="med"/>
-                    </a:lnT>
-                    <a:lnB w="6350" cap="flat" cmpd="sng" algn="ctr">
-                      <a:solidFill>
-                        <a:srgbClr val="E4DADD"/>
-                      </a:solidFill>
-                      <a:prstDash val="solid"/>
-                      <a:round/>
-                      <a:headEnd type="none" w="med" len="med"/>
-                      <a:tailEnd type="none" w="med" len="med"/>
-                    </a:lnB>
-                  </a:tcPr>
-                </a:tc>
-                <a:tc>
-                  <a:txBody>
-                    <a:bodyPr/>
-                    <a:lstStyle/>
-                    <a:p>
-                      <a:pPr indent="0" marL="0">
-                        <a:buNone/>
-                      </a:pPr>
-                      <a:r>
-                        <a:rPr lang="en-US" sz="950" dirty="0">
-                          <a:solidFill>
-                            <a:srgbClr val="1F1A1C"/>
-                          </a:solidFill>
-                          <a:latin typeface="Calibri" pitchFamily="34" charset="0"/>
-                          <a:ea typeface="Calibri" pitchFamily="34" charset="-122"/>
-                          <a:cs typeface="Calibri" pitchFamily="34" charset="-120"/>
-                        </a:rPr>
-                        <a:t>約51.9〜57.0億円</a:t>
-                      </a:r>
-                      <a:endParaRPr lang="en-US" sz="950" dirty="0">
-                        <a:latin typeface="Calibri" charset="0"/>
-                        <a:ea typeface="Calibri" charset="0"/>
-                        <a:cs typeface="Calibri" charset="0"/>
-                      </a:endParaRPr>
-                    </a:p>
-                  </a:txBody>
-                  <a:tcPr marL="63500" marR="63500" marT="38100" marB="38100" anchor="ctr">
-                    <a:lnL w="6350" cap="flat" cmpd="sng" algn="ctr">
-                      <a:solidFill>
-                        <a:srgbClr val="E4DADD"/>
-                      </a:solidFill>
-                      <a:prstDash val="solid"/>
-                      <a:round/>
-                      <a:headEnd type="none" w="med" len="med"/>
-                      <a:tailEnd type="none" w="med" len="med"/>
-                    </a:lnL>
-                    <a:lnR w="6350" cap="flat" cmpd="sng" algn="ctr">
-                      <a:solidFill>
-                        <a:srgbClr val="E4DADD"/>
-                      </a:solidFill>
-                      <a:prstDash val="solid"/>
-                      <a:round/>
-                      <a:headEnd type="none" w="med" len="med"/>
-                      <a:tailEnd type="none" w="med" len="med"/>
-                    </a:lnR>
-                    <a:lnT w="6350" cap="flat" cmpd="sng" algn="ctr">
-                      <a:solidFill>
-                        <a:srgbClr val="E4DADD"/>
-                      </a:solidFill>
-                      <a:prstDash val="solid"/>
-                      <a:round/>
-                      <a:headEnd type="none" w="med" len="med"/>
-                      <a:tailEnd type="none" w="med" len="med"/>
-                    </a:lnT>
-                    <a:lnB w="6350" cap="flat" cmpd="sng" algn="ctr">
-                      <a:solidFill>
-                        <a:srgbClr val="E4DADD"/>
-                      </a:solidFill>
-                      <a:prstDash val="solid"/>
-                      <a:round/>
-                      <a:headEnd type="none" w="med" len="med"/>
-                      <a:tailEnd type="none" w="med" len="med"/>
-                    </a:lnB>
-                  </a:tcPr>
-                </a:tc>
-                <a:tc>
-                  <a:txBody>
-                    <a:bodyPr/>
-                    <a:lstStyle/>
-                    <a:p>
-                      <a:pPr indent="0" marL="0">
-                        <a:buNone/>
-                      </a:pPr>
-                      <a:r>
-                        <a:rPr lang="en-US" sz="950" dirty="0">
-                          <a:solidFill>
-                            <a:srgbClr val="1F1A1C"/>
-                          </a:solidFill>
-                          <a:latin typeface="Calibri" pitchFamily="34" charset="0"/>
-                          <a:ea typeface="Calibri" pitchFamily="34" charset="-122"/>
-                          <a:cs typeface="Calibri" pitchFamily="34" charset="-120"/>
-                        </a:rPr>
-                        <a:t>約53.9〜54.9億円</a:t>
-                      </a:r>
-                      <a:endParaRPr lang="en-US" sz="950" dirty="0">
-                        <a:latin typeface="Calibri" charset="0"/>
-                        <a:ea typeface="Calibri" charset="0"/>
-                        <a:cs typeface="Calibri" charset="0"/>
-                      </a:endParaRPr>
-                    </a:p>
-                  </a:txBody>
-                  <a:tcPr marL="63500" marR="63500" marT="38100" marB="38100" anchor="ctr">
-                    <a:lnL w="6350" cap="flat" cmpd="sng" algn="ctr">
-                      <a:solidFill>
-                        <a:srgbClr val="E4DADD"/>
-                      </a:solidFill>
-                      <a:prstDash val="solid"/>
-                      <a:round/>
-                      <a:headEnd type="none" w="med" len="med"/>
-                      <a:tailEnd type="none" w="med" len="med"/>
-                    </a:lnL>
-                    <a:lnR w="6350" cap="flat" cmpd="sng" algn="ctr">
-                      <a:solidFill>
-                        <a:srgbClr val="E4DADD"/>
-                      </a:solidFill>
-                      <a:prstDash val="solid"/>
-                      <a:round/>
-                      <a:headEnd type="none" w="med" len="med"/>
-                      <a:tailEnd type="none" w="med" len="med"/>
-                    </a:lnR>
-                    <a:lnT w="6350" cap="flat" cmpd="sng" algn="ctr">
-                      <a:solidFill>
-                        <a:srgbClr val="E4DADD"/>
-                      </a:solidFill>
-                      <a:prstDash val="solid"/>
-                      <a:round/>
-                      <a:headEnd type="none" w="med" len="med"/>
-                      <a:tailEnd type="none" w="med" len="med"/>
-                    </a:lnT>
-                    <a:lnB w="6350" cap="flat" cmpd="sng" algn="ctr">
-                      <a:solidFill>
-                        <a:srgbClr val="E4DADD"/>
-                      </a:solidFill>
-                      <a:prstDash val="solid"/>
-                      <a:round/>
-                      <a:headEnd type="none" w="med" len="med"/>
-                      <a:tailEnd type="none" w="med" len="med"/>
-                    </a:lnB>
-                  </a:tcPr>
-                </a:tc>
-                <a:tc>
-                  <a:txBody>
-                    <a:bodyPr/>
-                    <a:lstStyle/>
-                    <a:p>
-                      <a:pPr algn="ctr" indent="0" marL="0">
-                        <a:buNone/>
-                      </a:pPr>
-                      <a:r>
-                        <a:rPr lang="en-US" sz="950" b="1" dirty="0">
-                          <a:solidFill>
-                            <a:srgbClr val="B58B2A"/>
-                          </a:solidFill>
-                          <a:latin typeface="Calibri" pitchFamily="34" charset="0"/>
-                          <a:ea typeface="Calibri" pitchFamily="34" charset="-122"/>
-                          <a:cs typeface="Calibri" pitchFamily="34" charset="-120"/>
-                        </a:rPr>
                         <a:t>下限比＋2〜3億円</a:t>
                       </a:r>
                       <a:endParaRPr lang="en-US" sz="950" dirty="0">
@@ -6273,6 +6556,27 @@
                         <a:cs typeface="Calibri" charset="0"/>
                       </a:endParaRPr>
                     </a:p>
+                    <a:p>
+                      <a:pPr indent="0" marL="0">
+                        <a:buNone/>
+                      </a:pPr>
+                      <a:r>
+                        <a:rPr lang="en-US" sz="950" dirty="0">
+                          <a:solidFill>
+                            <a:srgbClr val="1F1A1C"/>
+                          </a:solidFill>
+                          <a:latin typeface="Calibri" pitchFamily="34" charset="0"/>
+                          <a:ea typeface="Calibri" pitchFamily="34" charset="-122"/>
+                          <a:cs typeface="Calibri" pitchFamily="34" charset="-120"/>
+                        </a:rPr>
+                        <a:t>4年目に星評価を失った場合は52.75〜53.75億円</a:t>
+                      </a:r>
+                      <a:endParaRPr lang="en-US" sz="950" dirty="0">
+                        <a:latin typeface="Calibri" charset="0"/>
+                        <a:ea typeface="Calibri" charset="0"/>
+                        <a:cs typeface="Calibri" charset="0"/>
+                      </a:endParaRPr>
+                    </a:p>
                   </a:txBody>
                   <a:tcPr marL="63500" marR="63500" marT="38100" marB="38100" anchor="ctr">
                     <a:lnL w="6350" cap="flat" cmpd="sng" algn="ctr">
@@ -6330,7 +6634,28 @@
                           <a:ea typeface="Calibri" pitchFamily="34" charset="-122"/>
                           <a:cs typeface="Calibri" pitchFamily="34" charset="-120"/>
                         </a:rPr>
-                        <a:t>成果が出た場合のみ</a:t>
+                        <a:t>中立</a:t>
+                      </a:r>
+                      <a:endParaRPr lang="en-US" sz="950" dirty="0">
+                        <a:latin typeface="Calibri" charset="0"/>
+                        <a:ea typeface="Calibri" charset="0"/>
+                        <a:cs typeface="Calibri" charset="0"/>
+                      </a:endParaRPr>
+                    </a:p>
+                    <a:p>
+                      <a:pPr algn="ctr" indent="0" marL="0">
+                        <a:buNone/>
+                      </a:pPr>
+                      <a:r>
+                        <a:rPr lang="en-US" sz="950" b="1" dirty="0">
+                          <a:solidFill>
+                            <a:srgbClr val="B58B2A"/>
+                          </a:solidFill>
+                          <a:latin typeface="Calibri" pitchFamily="34" charset="0"/>
+                          <a:ea typeface="Calibri" pitchFamily="34" charset="-122"/>
+                          <a:cs typeface="Calibri" pitchFamily="34" charset="-120"/>
+                        </a:rPr>
+                        <a:t>損金不算入だが成果連動</a:t>
                       </a:r>
                       <a:endParaRPr lang="en-US" sz="950" dirty="0">
                         <a:latin typeface="Calibri" charset="0"/>
@@ -6906,7 +7231,7 @@
                 <a:ea typeface="Calibri" pitchFamily="34" charset="-122"/>
                 <a:cs typeface="Calibri" pitchFamily="34" charset="-120"/>
               </a:rPr>
-              <a:t>確定で払う価格の上限が下がった</a:t>
+              <a:t>価格を入札の最高札と同水準で確定</a:t>
             </a:r>
             <a:endParaRPr lang="en-US" sz="1100" dirty="0"/>
           </a:p>
@@ -6948,7 +7273,7 @@
                 <a:ea typeface="Calibri" pitchFamily="34" charset="-122"/>
                 <a:cs typeface="Calibri" pitchFamily="34" charset="-120"/>
               </a:rPr>
-              <a:t>株式譲渡対価は50〜51億円で確定。LOIの上限55.3億円より低く、上振れ分は成果が出た場合のみ支払います。</a:t>
+              <a:t>株式譲渡対価は入札の最高札（50.5億円）と同水準の50〜51億円で確定。LOIの上限55.3億円より低く、上振れ分は成果が出た場合のみ支払います。</a:t>
             </a:r>
             <a:endParaRPr lang="en-US" sz="950" dirty="0"/>
           </a:p>
@@ -7542,7 +7867,7 @@
                 <a:ea typeface="Calibri" pitchFamily="34" charset="-122"/>
                 <a:cs typeface="Calibri" pitchFamily="34" charset="-120"/>
               </a:rPr>
-              <a:t>ネットキャッシュ連動がなくなった</a:t>
+              <a:t>価格固定に伴う資金流出への備え</a:t>
             </a:r>
             <a:endParaRPr lang="en-US" sz="1100" dirty="0"/>
           </a:p>
@@ -7584,7 +7909,7 @@
                 <a:ea typeface="Calibri" pitchFamily="34" charset="-122"/>
                 <a:cs typeface="Calibri" pitchFamily="34" charset="-120"/>
               </a:rPr>
-              <a:t>価格が固定のため、決済までの配当・賞与・退職金などの資金流出を契約で防ぐ必要があります。</a:t>
+              <a:t>ネットキャッシュ連動がないため、決済までの配当・賞与・退職金などの資金流出を契約で防ぐ必要があります。</a:t>
             </a:r>
             <a:endParaRPr lang="en-US" sz="950" dirty="0"/>
           </a:p>
@@ -7860,7 +8185,7 @@
                 <a:ea typeface="Calibri" pitchFamily="34" charset="-122"/>
                 <a:cs typeface="Calibri" pitchFamily="34" charset="-120"/>
               </a:rPr>
-              <a:t>ロックアップ後の関与</a:t>
+              <a:t>ロックアップ後の関与は売主の裁量</a:t>
             </a:r>
             <a:endParaRPr lang="en-US" sz="1100" dirty="0"/>
           </a:p>
@@ -7902,7 +8227,7 @@
                 <a:ea typeface="Calibri" pitchFamily="34" charset="-122"/>
                 <a:cs typeface="Calibri" pitchFamily="34" charset="-120"/>
               </a:rPr>
-              <a:t>出勤義務がなくなります。競業避止と名称の使用許諾で補います。A案では在任2年で3年分を前払いします。</a:t>
+              <a:t>報酬は不要になる一方、出勤義務はなくなります。競業避止と名称の使用許諾で担保します。A案では在任2年で3年分を前払いします。</a:t>
             </a:r>
             <a:endParaRPr lang="en-US" sz="950" dirty="0"/>
           </a:p>
